--- a/Data Types & Structures/Java Data Structures.PPTX
+++ b/Data Types & Structures/Java Data Structures.PPTX
@@ -5,7 +5,7 @@
     <p:sldMasterId id="2147483672" r:id="rId1"/>
   </p:sldMasterIdLst>
   <p:sldIdLst>
-    <p:sldId id="267" r:id="rId2"/>
+    <p:sldId id="256" r:id="rId2"/>
     <p:sldId id="270" r:id="rId3"/>
     <p:sldId id="271" r:id="rId4"/>
     <p:sldId id="275" r:id="rId5"/>
@@ -348,7 +348,7 @@
           <a:p>
             <a:fld id="{A0AF1CD2-03D0-4BEA-98B7-6677F56063D9}" type="datetimeFigureOut">
               <a:rPr lang="en-US" smtClean="0"/>
-              <a:t>5/4/2026</a:t>
+              <a:t>5/5/2026</a:t>
             </a:fld>
             <a:endParaRPr lang="en-US"/>
           </a:p>
@@ -556,7 +556,7 @@
           <a:p>
             <a:fld id="{A0AF1CD2-03D0-4BEA-98B7-6677F56063D9}" type="datetimeFigureOut">
               <a:rPr lang="en-US" smtClean="0"/>
-              <a:t>5/4/2026</a:t>
+              <a:t>5/5/2026</a:t>
             </a:fld>
             <a:endParaRPr lang="en-US"/>
           </a:p>
@@ -812,7 +812,7 @@
           <a:p>
             <a:fld id="{A0AF1CD2-03D0-4BEA-98B7-6677F56063D9}" type="datetimeFigureOut">
               <a:rPr lang="en-US" smtClean="0"/>
-              <a:t>5/4/2026</a:t>
+              <a:t>5/5/2026</a:t>
             </a:fld>
             <a:endParaRPr lang="en-US"/>
           </a:p>
@@ -982,7 +982,7 @@
           <a:p>
             <a:fld id="{A0AF1CD2-03D0-4BEA-98B7-6677F56063D9}" type="datetimeFigureOut">
               <a:rPr lang="en-US" smtClean="0"/>
-              <a:t>5/4/2026</a:t>
+              <a:t>5/5/2026</a:t>
             </a:fld>
             <a:endParaRPr lang="en-US"/>
           </a:p>
@@ -1325,7 +1325,7 @@
           <a:p>
             <a:fld id="{A0AF1CD2-03D0-4BEA-98B7-6677F56063D9}" type="datetimeFigureOut">
               <a:rPr lang="en-US" smtClean="0"/>
-              <a:t>5/4/2026</a:t>
+              <a:t>5/5/2026</a:t>
             </a:fld>
             <a:endParaRPr lang="en-US"/>
           </a:p>
@@ -1600,7 +1600,7 @@
           <a:p>
             <a:fld id="{A0AF1CD2-03D0-4BEA-98B7-6677F56063D9}" type="datetimeFigureOut">
               <a:rPr lang="en-US" smtClean="0"/>
-              <a:t>5/4/2026</a:t>
+              <a:t>5/5/2026</a:t>
             </a:fld>
             <a:endParaRPr lang="en-US"/>
           </a:p>
@@ -1979,7 +1979,7 @@
           <a:p>
             <a:fld id="{A0AF1CD2-03D0-4BEA-98B7-6677F56063D9}" type="datetimeFigureOut">
               <a:rPr lang="en-US" smtClean="0"/>
-              <a:t>5/4/2026</a:t>
+              <a:t>5/5/2026</a:t>
             </a:fld>
             <a:endParaRPr lang="en-US"/>
           </a:p>
@@ -2097,7 +2097,7 @@
           <a:p>
             <a:fld id="{A0AF1CD2-03D0-4BEA-98B7-6677F56063D9}" type="datetimeFigureOut">
               <a:rPr lang="en-US" smtClean="0"/>
-              <a:t>5/4/2026</a:t>
+              <a:t>5/5/2026</a:t>
             </a:fld>
             <a:endParaRPr lang="en-US"/>
           </a:p>
@@ -2268,7 +2268,7 @@
           <a:p>
             <a:fld id="{A0AF1CD2-03D0-4BEA-98B7-6677F56063D9}" type="datetimeFigureOut">
               <a:rPr lang="en-US" smtClean="0"/>
-              <a:t>5/4/2026</a:t>
+              <a:t>5/5/2026</a:t>
             </a:fld>
             <a:endParaRPr lang="en-US"/>
           </a:p>
@@ -2622,7 +2622,7 @@
           <a:p>
             <a:fld id="{A0AF1CD2-03D0-4BEA-98B7-6677F56063D9}" type="datetimeFigureOut">
               <a:rPr lang="en-US" smtClean="0"/>
-              <a:t>5/4/2026</a:t>
+              <a:t>5/5/2026</a:t>
             </a:fld>
             <a:endParaRPr lang="en-US"/>
           </a:p>
@@ -2999,7 +2999,7 @@
           <a:p>
             <a:fld id="{A0AF1CD2-03D0-4BEA-98B7-6677F56063D9}" type="datetimeFigureOut">
               <a:rPr lang="en-US" smtClean="0"/>
-              <a:t>5/4/2026</a:t>
+              <a:t>5/5/2026</a:t>
             </a:fld>
             <a:endParaRPr lang="en-US"/>
           </a:p>
@@ -3286,7 +3286,7 @@
           <a:p>
             <a:fld id="{A0AF1CD2-03D0-4BEA-98B7-6677F56063D9}" type="datetimeFigureOut">
               <a:rPr lang="en-US" smtClean="0"/>
-              <a:t>5/4/2026</a:t>
+              <a:t>5/5/2026</a:t>
             </a:fld>
             <a:endParaRPr lang="en-US"/>
           </a:p>
@@ -3798,13 +3798,7 @@
   <p:cSld>
     <p:spTree>
       <p:nvGrpSpPr>
-        <p:cNvPr id="1" name="">
-          <a:extLst>
-            <a:ext uri="{FF2B5EF4-FFF2-40B4-BE49-F238E27FC236}">
-              <a16:creationId xmlns:a16="http://schemas.microsoft.com/office/drawing/2014/main" id="{E7BF8073-9ACF-9143-A2C0-C4111DAB710F}"/>
-            </a:ext>
-          </a:extLst>
-        </p:cNvPr>
+        <p:cNvPr id="1" name=""/>
         <p:cNvGrpSpPr/>
         <p:nvPr/>
       </p:nvGrpSpPr>
@@ -3821,7 +3815,7 @@
           <p:cNvPr id="2" name="Title 1">
             <a:extLst>
               <a:ext uri="{FF2B5EF4-FFF2-40B4-BE49-F238E27FC236}">
-                <a16:creationId xmlns:a16="http://schemas.microsoft.com/office/drawing/2014/main" id="{657383C9-EDEB-0E70-7940-361660D834C2}"/>
+                <a16:creationId xmlns:a16="http://schemas.microsoft.com/office/drawing/2014/main" id="{2C801F14-9B9A-852E-499F-63373939D303}"/>
               </a:ext>
             </a:extLst>
           </p:cNvPr>
@@ -3834,8 +3828,8 @@
         </p:nvSpPr>
         <p:spPr>
           <a:xfrm>
-            <a:off x="965154" y="1021503"/>
-            <a:ext cx="10328193" cy="3034450"/>
+            <a:off x="931903" y="2666245"/>
+            <a:ext cx="10328193" cy="1330860"/>
           </a:xfrm>
         </p:spPr>
         <p:txBody>
@@ -3854,33 +3848,51 @@
       </p:sp>
       <p:sp>
         <p:nvSpPr>
-          <p:cNvPr id="3" name="Subtitle 2">
+          <p:cNvPr id="4" name="TextBox 3">
             <a:extLst>
               <a:ext uri="{FF2B5EF4-FFF2-40B4-BE49-F238E27FC236}">
-                <a16:creationId xmlns:a16="http://schemas.microsoft.com/office/drawing/2014/main" id="{F775122F-FA1D-8DF6-BB88-E33FFB9C23A5}"/>
+                <a16:creationId xmlns:a16="http://schemas.microsoft.com/office/drawing/2014/main" id="{DD047CA7-9C1C-28C7-E0B4-7A294E634F94}"/>
               </a:ext>
             </a:extLst>
           </p:cNvPr>
-          <p:cNvSpPr>
-            <a:spLocks noGrp="1"/>
-          </p:cNvSpPr>
-          <p:nvPr>
-            <p:ph type="subTitle" idx="1"/>
-          </p:nvPr>
-        </p:nvSpPr>
-        <p:spPr/>
-        <p:txBody>
-          <a:bodyPr/>
+          <p:cNvSpPr txBox="1"/>
+          <p:nvPr/>
+        </p:nvSpPr>
+        <p:spPr>
+          <a:xfrm>
+            <a:off x="3030069" y="4528153"/>
+            <a:ext cx="6131859" cy="954107"/>
+          </a:xfrm>
+          <a:prstGeom prst="rect">
+            <a:avLst/>
+          </a:prstGeom>
+          <a:noFill/>
+        </p:spPr>
+        <p:txBody>
+          <a:bodyPr wrap="square" rtlCol="0">
+            <a:spAutoFit/>
+          </a:bodyPr>
           <a:lstStyle/>
           <a:p>
-            <a:endParaRPr lang="en-US"/>
+            <a:pPr algn="ctr"/>
+            <a:r>
+              <a:rPr lang="en-US" sz="2800" dirty="0"/>
+              <a:t>Instructor: Dr. Sayyad Najafi</a:t>
+            </a:r>
+          </a:p>
+          <a:p>
+            <a:pPr algn="ctr"/>
+            <a:r>
+              <a:rPr lang="en-US" sz="2800" dirty="0"/>
+              <a:t>Teaching Assistant: Ramin Iranmanesh</a:t>
+            </a:r>
           </a:p>
         </p:txBody>
       </p:sp>
     </p:spTree>
     <p:extLst>
       <p:ext uri="{BB962C8B-B14F-4D97-AF65-F5344CB8AC3E}">
-        <p14:creationId xmlns:p14="http://schemas.microsoft.com/office/powerpoint/2010/main" val="2850954709"/>
+        <p14:creationId xmlns:p14="http://schemas.microsoft.com/office/powerpoint/2010/main" val="1155831941"/>
       </p:ext>
     </p:extLst>
   </p:cSld>
